--- a/hearts-and-minds/journey-decks/hm-journey-anita-v1.pptx
+++ b/hearts-and-minds/journey-decks/hm-journey-anita-v1.pptx
@@ -1923,7 +1923,7 @@
       </p:sp>
       <p:pic>
         <p:nvPicPr>
-          <p:cNvPr id="10" name="Image 1" descr="/sessions/quirky-zen-galileo/mnt/outputs/hmdecks/img/anita-portrait.jpg">    </p:cNvPr>
+          <p:cNvPr id="10" name="Image 1" descr="/sessions/quirky-zen-galileo/mnt/outputs/hmdecks5/img/anita-portrait.jpg">    </p:cNvPr>
           <p:cNvPicPr>
             <a:picLocks noChangeAspect="1"/>
           </p:cNvPicPr>
@@ -4323,7 +4323,7 @@
       </p:sp>
       <p:pic>
         <p:nvPicPr>
-          <p:cNvPr id="13" name="Image 1" descr="/sessions/quirky-zen-galileo/mnt/outputs/hmdecks/img/anita-stage1.jpg">    </p:cNvPr>
+          <p:cNvPr id="13" name="Image 1" descr="/sessions/quirky-zen-galileo/mnt/outputs/hmdecks5/img/anita-stage1.jpg">    </p:cNvPr>
           <p:cNvPicPr>
             <a:picLocks noChangeAspect="1"/>
           </p:cNvPicPr>
@@ -5256,7 +5256,7 @@
       </p:sp>
       <p:pic>
         <p:nvPicPr>
-          <p:cNvPr id="13" name="Image 1" descr="/sessions/quirky-zen-galileo/mnt/outputs/hmdecks/img/anita-stage2.jpg">    </p:cNvPr>
+          <p:cNvPr id="13" name="Image 1" descr="/sessions/quirky-zen-galileo/mnt/outputs/hmdecks5/img/anita-stage2.jpg">    </p:cNvPr>
           <p:cNvPicPr>
             <a:picLocks noChangeAspect="1"/>
           </p:cNvPicPr>
@@ -6189,7 +6189,7 @@
       </p:sp>
       <p:pic>
         <p:nvPicPr>
-          <p:cNvPr id="13" name="Image 1" descr="/sessions/quirky-zen-galileo/mnt/outputs/hmdecks/img/anita-stage3.jpg">    </p:cNvPr>
+          <p:cNvPr id="13" name="Image 1" descr="/sessions/quirky-zen-galileo/mnt/outputs/hmdecks5/img/anita-stage3.jpg">    </p:cNvPr>
           <p:cNvPicPr>
             <a:picLocks noChangeAspect="1"/>
           </p:cNvPicPr>
@@ -7122,7 +7122,7 @@
       </p:sp>
       <p:pic>
         <p:nvPicPr>
-          <p:cNvPr id="13" name="Image 1" descr="/sessions/quirky-zen-galileo/mnt/outputs/hmdecks/img/anita-stage4.jpg">    </p:cNvPr>
+          <p:cNvPr id="13" name="Image 1" descr="/sessions/quirky-zen-galileo/mnt/outputs/hmdecks5/img/anita-stage4.jpg">    </p:cNvPr>
           <p:cNvPicPr>
             <a:picLocks noChangeAspect="1"/>
           </p:cNvPicPr>
@@ -8055,7 +8055,7 @@
       </p:sp>
       <p:pic>
         <p:nvPicPr>
-          <p:cNvPr id="13" name="Image 1" descr="/sessions/quirky-zen-galileo/mnt/outputs/hmdecks/img/anita-stage5.jpg">    </p:cNvPr>
+          <p:cNvPr id="13" name="Image 1" descr="/sessions/quirky-zen-galileo/mnt/outputs/hmdecks5/img/anita-stage5.jpg">    </p:cNvPr>
           <p:cNvPicPr>
             <a:picLocks noChangeAspect="1"/>
           </p:cNvPicPr>
@@ -8988,7 +8988,7 @@
       </p:sp>
       <p:pic>
         <p:nvPicPr>
-          <p:cNvPr id="13" name="Image 1" descr="/sessions/quirky-zen-galileo/mnt/outputs/hmdecks/img/anita-stage6.jpg">    </p:cNvPr>
+          <p:cNvPr id="13" name="Image 1" descr="/sessions/quirky-zen-galileo/mnt/outputs/hmdecks5/img/anita-stage6.jpg">    </p:cNvPr>
           <p:cNvPicPr>
             <a:picLocks noChangeAspect="1"/>
           </p:cNvPicPr>
